--- a/courseware/DSA_CH06_Tree.pptx
+++ b/courseware/DSA_CH06_Tree.pptx
@@ -3320,7 +3320,7 @@
                 <a:latin typeface="Segoe UI"/>
                 <a:ea typeface="微软雅黑"/>
               </a:rPr>
-              <a:t>现代化重制版讲义　代码按 C++17 重写，全部可编译、可运行</a:t>
+              <a:t>现代化重制版讲义　代码按 C++17 重写；code/ 全部单元双档编译运行通过</a:t>
             </a:r>
           </a:p>
         </p:txBody>
@@ -10020,7 +10020,7 @@
                 <a:latin typeface="Segoe UI"/>
                 <a:ea typeface="微软雅黑"/>
               </a:rPr>
-              <a:t>习题（完整题面与参考答案见同名讲义）</a:t>
+              <a:t>习题选讲</a:t>
             </a:r>
           </a:p>
         </p:txBody>
@@ -10099,11 +10099,11 @@
                 <a:spcPts val="0"/>
               </a:spcBef>
               <a:spcAft>
-                <a:spcPts val="1240"/>
-              </a:spcAft>
-            </a:pPr>
-            <a:r>
-              <a:rPr sz="2000" b="0" i="0">
+                <a:spcPts val="1147"/>
+              </a:spcAft>
+            </a:pPr>
+            <a:r>
+              <a:rPr sz="1850" b="0" i="0">
                 <a:solidFill>
                   <a:srgbClr val="242A33"/>
                 </a:solidFill>
@@ -10113,7 +10113,7 @@
               <a:t>•  </a:t>
             </a:r>
             <a:r>
-              <a:rPr sz="2000" b="1" i="0">
+              <a:rPr sz="1850" b="1" i="0">
                 <a:solidFill>
                   <a:srgbClr val="12395B"/>
                 </a:solidFill>
@@ -10123,7 +10123,7 @@
               <a:t>补充 1</a:t>
             </a:r>
             <a:r>
-              <a:rPr sz="2000" b="0" i="0">
+              <a:rPr sz="1850" b="0" i="0">
                 <a:solidFill>
                   <a:srgbClr val="242A33"/>
                 </a:solidFill>
@@ -10142,11 +10142,11 @@
                 <a:spcPts val="0"/>
               </a:spcBef>
               <a:spcAft>
-                <a:spcPts val="1240"/>
-              </a:spcAft>
-            </a:pPr>
-            <a:r>
-              <a:rPr sz="2000" b="0" i="0">
+                <a:spcPts val="1147"/>
+              </a:spcAft>
+            </a:pPr>
+            <a:r>
+              <a:rPr sz="1850" b="0" i="0">
                 <a:solidFill>
                   <a:srgbClr val="242A33"/>
                 </a:solidFill>
@@ -10156,7 +10156,7 @@
               <a:t>•  </a:t>
             </a:r>
             <a:r>
-              <a:rPr sz="2000" b="1" i="0">
+              <a:rPr sz="1850" b="1" i="0">
                 <a:solidFill>
                   <a:srgbClr val="12395B"/>
                 </a:solidFill>
@@ -10166,7 +10166,7 @@
               <a:t>补充 2</a:t>
             </a:r>
             <a:r>
-              <a:rPr sz="2000" b="0" i="0">
+              <a:rPr sz="1850" b="0" i="0">
                 <a:solidFill>
                   <a:srgbClr val="242A33"/>
                 </a:solidFill>
@@ -10176,7 +10176,7 @@
               <a:t>　用并查集判断 </a:t>
             </a:r>
             <a:r>
-              <a:rPr sz="1879" b="0" i="0">
+              <a:rPr sz="1739" b="0" i="0">
                 <a:solidFill>
                   <a:srgbClr val="242A33"/>
                 </a:solidFill>
@@ -10186,7 +10186,7 @@
               <a:t>a==b</a:t>
             </a:r>
             <a:r>
-              <a:rPr sz="2000" b="0" i="0">
+              <a:rPr sz="1850" b="0" i="0">
                 <a:solidFill>
                   <a:srgbClr val="242A33"/>
                 </a:solidFill>
@@ -10196,7 +10196,7 @@
               <a:t> / </a:t>
             </a:r>
             <a:r>
-              <a:rPr sz="1879" b="0" i="0">
+              <a:rPr sz="1739" b="0" i="0">
                 <a:solidFill>
                   <a:srgbClr val="242A33"/>
                 </a:solidFill>
@@ -10206,7 +10206,7 @@
               <a:t>a!=b</a:t>
             </a:r>
             <a:r>
-              <a:rPr sz="2000" b="0" i="0">
+              <a:rPr sz="1850" b="0" i="0">
                 <a:solidFill>
                   <a:srgbClr val="242A33"/>
                 </a:solidFill>
@@ -10216,7 +10216,7 @@
               <a:t> 方程组是否有解，并分析</a:t>
             </a:r>
             <a:r>
-              <a:rPr sz="2000" b="1" i="0">
+              <a:rPr sz="1850" b="1" i="0">
                 <a:solidFill>
                   <a:srgbClr val="12395B"/>
                 </a:solidFill>
@@ -10226,7 +10226,7 @@
               <a:t>三种</a:t>
             </a:r>
             <a:r>
-              <a:rPr sz="2000" b="0" i="0">
+              <a:rPr sz="1850" b="0" i="0">
                 <a:solidFill>
                   <a:srgbClr val="242A33"/>
                 </a:solidFill>
@@ -10245,11 +10245,11 @@
                 <a:spcPts val="0"/>
               </a:spcBef>
               <a:spcAft>
-                <a:spcPts val="1240"/>
-              </a:spcAft>
-            </a:pPr>
-            <a:r>
-              <a:rPr sz="2000" b="0" i="0">
+                <a:spcPts val="1147"/>
+              </a:spcAft>
+            </a:pPr>
+            <a:r>
+              <a:rPr sz="1850" b="0" i="0">
                 <a:solidFill>
                   <a:srgbClr val="242A33"/>
                 </a:solidFill>
@@ -10259,7 +10259,7 @@
               <a:t>•  </a:t>
             </a:r>
             <a:r>
-              <a:rPr sz="2000" b="1" i="0">
+              <a:rPr sz="1850" b="1" i="0">
                 <a:solidFill>
                   <a:srgbClr val="12395B"/>
                 </a:solidFill>
@@ -10269,7 +10269,7 @@
               <a:t>习题 1</a:t>
             </a:r>
             <a:r>
-              <a:rPr sz="2000" b="0" i="0">
+              <a:rPr sz="1850" b="0" i="0">
                 <a:solidFill>
                   <a:srgbClr val="242A33"/>
                 </a:solidFill>
@@ -10279,7 +10279,7 @@
               <a:t>　三棵树的森林 → 二叉树 → 再转回来，</a:t>
             </a:r>
             <a:r>
-              <a:rPr sz="2000" b="1" i="0">
+              <a:rPr sz="1850" b="1" i="0">
                 <a:solidFill>
                   <a:srgbClr val="12395B"/>
                 </a:solidFill>
@@ -10298,11 +10298,11 @@
                 <a:spcPts val="0"/>
               </a:spcBef>
               <a:spcAft>
-                <a:spcPts val="1240"/>
-              </a:spcAft>
-            </a:pPr>
-            <a:r>
-              <a:rPr sz="2000" b="0" i="0">
+                <a:spcPts val="1147"/>
+              </a:spcAft>
+            </a:pPr>
+            <a:r>
+              <a:rPr sz="1850" b="0" i="0">
                 <a:solidFill>
                   <a:srgbClr val="242A33"/>
                 </a:solidFill>
@@ -10312,7 +10312,7 @@
               <a:t>•  </a:t>
             </a:r>
             <a:r>
-              <a:rPr sz="2000" b="1" i="0">
+              <a:rPr sz="1850" b="1" i="0">
                 <a:solidFill>
                   <a:srgbClr val="12395B"/>
                 </a:solidFill>
@@ -10322,7 +10322,7 @@
               <a:t>习题 2</a:t>
             </a:r>
             <a:r>
-              <a:rPr sz="2000" b="0" i="0">
+              <a:rPr sz="1850" b="0" i="0">
                 <a:solidFill>
                   <a:srgbClr val="242A33"/>
                 </a:solidFill>
@@ -10332,7 +10332,7 @@
               <a:t>　对 </a:t>
             </a:r>
             <a:r>
-              <a:rPr sz="1879" b="0" i="0">
+              <a:rPr sz="1739" b="0" i="0">
                 <a:solidFill>
                   <a:srgbClr val="242A33"/>
                 </a:solidFill>
@@ -10342,7 +10342,7 @@
               <a:t>A(B(E,F),C(G),D(H,I,J))</a:t>
             </a:r>
             <a:r>
-              <a:rPr sz="2000" b="0" i="0">
+              <a:rPr sz="1850" b="0" i="0">
                 <a:solidFill>
                   <a:srgbClr val="242A33"/>
                 </a:solidFill>
@@ -10361,11 +10361,11 @@
                 <a:spcPts val="0"/>
               </a:spcBef>
               <a:spcAft>
-                <a:spcPts val="1240"/>
-              </a:spcAft>
-            </a:pPr>
-            <a:r>
-              <a:rPr sz="2000" b="0" i="0">
+                <a:spcPts val="1147"/>
+              </a:spcAft>
+            </a:pPr>
+            <a:r>
+              <a:rPr sz="1850" b="0" i="0">
                 <a:solidFill>
                   <a:srgbClr val="242A33"/>
                 </a:solidFill>
@@ -10375,7 +10375,7 @@
               <a:t>•  </a:t>
             </a:r>
             <a:r>
-              <a:rPr sz="2000" b="1" i="0">
+              <a:rPr sz="1850" b="1" i="0">
                 <a:solidFill>
                   <a:srgbClr val="12395B"/>
                 </a:solidFill>
@@ -10385,7 +10385,7 @@
               <a:t>习题 3</a:t>
             </a:r>
             <a:r>
-              <a:rPr sz="2000" b="0" i="0">
+              <a:rPr sz="1850" b="0" i="0">
                 <a:solidFill>
                   <a:srgbClr val="242A33"/>
                 </a:solidFill>
@@ -10404,11 +10404,11 @@
                 <a:spcPts val="0"/>
               </a:spcBef>
               <a:spcAft>
-                <a:spcPts val="1240"/>
-              </a:spcAft>
-            </a:pPr>
-            <a:r>
-              <a:rPr sz="2000" b="0" i="0">
+                <a:spcPts val="1147"/>
+              </a:spcAft>
+            </a:pPr>
+            <a:r>
+              <a:rPr sz="1850" b="0" i="0">
                 <a:solidFill>
                   <a:srgbClr val="242A33"/>
                 </a:solidFill>
@@ -10418,7 +10418,7 @@
               <a:t>•  </a:t>
             </a:r>
             <a:r>
-              <a:rPr sz="2000" b="1" i="0">
+              <a:rPr sz="1850" b="1" i="0">
                 <a:solidFill>
                   <a:srgbClr val="12395B"/>
                 </a:solidFill>
@@ -10428,7 +10428,7 @@
               <a:t>习题 5</a:t>
             </a:r>
             <a:r>
-              <a:rPr sz="2000" b="0" i="0">
+              <a:rPr sz="1850" b="0" i="0">
                 <a:solidFill>
                   <a:srgbClr val="242A33"/>
                 </a:solidFill>
@@ -10438,7 +10438,7 @@
               <a:t>　依次 </a:t>
             </a:r>
             <a:r>
-              <a:rPr sz="1879" b="0" i="0">
+              <a:rPr sz="1739" b="0" i="0">
                 <a:solidFill>
                   <a:srgbClr val="242A33"/>
                 </a:solidFill>
@@ -10448,7 +10448,7 @@
               <a:t>unite(0,1)</a:t>
             </a:r>
             <a:r>
-              <a:rPr sz="2000" b="0" i="0">
+              <a:rPr sz="1850" b="0" i="0">
                 <a:solidFill>
                   <a:srgbClr val="242A33"/>
                 </a:solidFill>
@@ -10458,7 +10458,7 @@
               <a:t>、</a:t>
             </a:r>
             <a:r>
-              <a:rPr sz="1879" b="0" i="0">
+              <a:rPr sz="1739" b="0" i="0">
                 <a:solidFill>
                   <a:srgbClr val="242A33"/>
                 </a:solidFill>
@@ -10468,7 +10468,7 @@
               <a:t>unite(1,2)</a:t>
             </a:r>
             <a:r>
-              <a:rPr sz="2000" b="0" i="0">
+              <a:rPr sz="1850" b="0" i="0">
                 <a:solidFill>
                   <a:srgbClr val="242A33"/>
                 </a:solidFill>
@@ -10478,7 +10478,7 @@
               <a:t>、</a:t>
             </a:r>
             <a:r>
-              <a:rPr sz="1879" b="0" i="0">
+              <a:rPr sz="1739" b="0" i="0">
                 <a:solidFill>
                   <a:srgbClr val="242A33"/>
                 </a:solidFill>
@@ -10488,7 +10488,7 @@
               <a:t>unite(3,4)</a:t>
             </a:r>
             <a:r>
-              <a:rPr sz="2000" b="0" i="0">
+              <a:rPr sz="1850" b="0" i="0">
                 <a:solidFill>
                   <a:srgbClr val="242A33"/>
                 </a:solidFill>
@@ -10498,7 +10498,7 @@
               <a:t>，画父指针；再 </a:t>
             </a:r>
             <a:r>
-              <a:rPr sz="1879" b="0" i="0">
+              <a:rPr sz="1739" b="0" i="0">
                 <a:solidFill>
                   <a:srgbClr val="242A33"/>
                 </a:solidFill>
@@ -10508,7 +10508,7 @@
               <a:t>find(0)</a:t>
             </a:r>
             <a:r>
-              <a:rPr sz="2000" b="0" i="0">
+              <a:rPr sz="1850" b="0" i="0">
                 <a:solidFill>
                   <a:srgbClr val="242A33"/>
                 </a:solidFill>
@@ -10527,11 +10527,11 @@
                 <a:spcPts val="0"/>
               </a:spcBef>
               <a:spcAft>
-                <a:spcPts val="1240"/>
-              </a:spcAft>
-            </a:pPr>
-            <a:r>
-              <a:rPr sz="2000" b="0" i="0">
+                <a:spcPts val="1147"/>
+              </a:spcAft>
+            </a:pPr>
+            <a:r>
+              <a:rPr sz="1850" b="0" i="0">
                 <a:solidFill>
                   <a:srgbClr val="242A33"/>
                 </a:solidFill>
@@ -10541,7 +10541,7 @@
               <a:t>•  </a:t>
             </a:r>
             <a:r>
-              <a:rPr sz="2000" b="1" i="0">
+              <a:rPr sz="1850" b="1" i="0">
                 <a:solidFill>
                   <a:srgbClr val="12395B"/>
                 </a:solidFill>
@@ -10551,7 +10551,7 @@
               <a:t>习题 6</a:t>
             </a:r>
             <a:r>
-              <a:rPr sz="2000" b="0" i="0">
+              <a:rPr sz="1850" b="0" i="0">
                 <a:solidFill>
                   <a:srgbClr val="242A33"/>
                 </a:solidFill>
@@ -10559,6 +10559,79 @@
                 <a:ea typeface="微软雅黑"/>
               </a:rPr>
               <a:t>　完全 3 叉树按层编号，写出结点 4 的父和孩子们</a:t>
+            </a:r>
+          </a:p>
+          <a:p>
+            <a:pPr algn="l">
+              <a:lnSpc>
+                <a:spcPct val="132000"/>
+              </a:lnSpc>
+              <a:spcBef>
+                <a:spcPts val="0"/>
+              </a:spcBef>
+              <a:spcAft>
+                <a:spcPts val="1147"/>
+              </a:spcAft>
+            </a:pPr>
+            <a:r>
+              <a:rPr sz="1850" b="0" i="0">
+                <a:solidFill>
+                  <a:srgbClr val="242A33"/>
+                </a:solidFill>
+                <a:latin typeface="Segoe UI"/>
+                <a:ea typeface="微软雅黑"/>
+              </a:rPr>
+              <a:t>•  </a:t>
+            </a:r>
+            <a:r>
+              <a:rPr sz="1850" b="1" i="0">
+                <a:solidFill>
+                  <a:srgbClr val="12395B"/>
+                </a:solidFill>
+                <a:latin typeface="Segoe UI"/>
+                <a:ea typeface="微软雅黑"/>
+              </a:rPr>
+              <a:t>这一页和讲义里都是选讲。</a:t>
+            </a:r>
+            <a:r>
+              <a:rPr sz="1850" b="0" i="0">
+                <a:solidFill>
+                  <a:srgbClr val="242A33"/>
+                </a:solidFill>
+                <a:latin typeface="Segoe UI"/>
+                <a:ea typeface="微软雅黑"/>
+              </a:rPr>
+              <a:t> 原书全部 </a:t>
+            </a:r>
+            <a:r>
+              <a:rPr sz="1850" b="1" i="0">
+                <a:solidFill>
+                  <a:srgbClr val="12395B"/>
+                </a:solidFill>
+                <a:latin typeface="Segoe UI"/>
+                <a:ea typeface="微软雅黑"/>
+              </a:rPr>
+              <a:t>345 道</a:t>
+            </a:r>
+            <a:r>
+              <a:rPr sz="1850" b="0" i="0">
+                <a:solidFill>
+                  <a:srgbClr val="242A33"/>
+                </a:solidFill>
+                <a:latin typeface="Segoe UI"/>
+                <a:ea typeface="微软雅黑"/>
+              </a:rPr>
+              <a:t>习题与上机题的参考答案，在 </a:t>
+            </a:r>
+            <a:r>
+              <a:rPr sz="1739" b="0" i="0">
+                <a:solidFill>
+                  <a:srgbClr val="242A33"/>
+                </a:solidFill>
+                <a:latin typeface="Consolas"/>
+                <a:ea typeface="Consolas"/>
+              </a:rPr>
+              <a:t>book/习题与参考答案.md</a:t>
             </a:r>
           </a:p>
         </p:txBody>
